--- a/templates/tiktok-ads-dark.pptx
+++ b/templates/tiktok-ads-dark.pptx
@@ -3294,7 +3294,7 @@
                 <a:cs typeface="Poppins"/>
                 <a:sym typeface="Poppins"/>
               </a:rPr>
-              <a:t>Meta </a:t>
+              <a:t>TikTok </a:t>
             </a:r>
             <a:r>
               <a:rPr b="0" i="0" lang="en-US" sz="1400" u="none" cap="none" strike="noStrike">
